--- a/Foundation_F4/Workshop/F4-W03_Apply_Workshop_L05-L06_The_School_Council_Meeting.pptx
+++ b/Foundation_F4/Workshop/F4-W03_Apply_Workshop_L05-L06_The_School_Council_Meeting.pptx
@@ -7517,7 +7517,7 @@
                 <a:latin typeface="Calibri" pitchFamily="34" charset="0"/>
                 <a:cs typeface="Amiri" pitchFamily="2" charset="-78"/>
               </a:rPr>
-              <a:t>Odd numbers come from F4-L05, even numbers from F4-L06. Core: a full sentence from the starter. Develop: add the “more” part. Stretch: link two answers with </a:t>
+              <a:t>Odd numbers come from F4-L05, even numbers from F4-L06. Core: a full sentence from the starter. Develop: add the “more” part. Stretch: link two answers with ‏</a:t>
             </a:r>
             <a:pPr algn="l" indent="0" marL="0">
               <a:buNone/>
@@ -7544,7 +7544,7 @@
                 <a:latin typeface="Calibri" pitchFamily="34" charset="0"/>
                 <a:cs typeface="Amiri" pitchFamily="2" charset="-78"/>
               </a:rPr>
-              <a:t>, </a:t>
+              <a:t>‏, ‏</a:t>
             </a:r>
             <a:pPr algn="l" indent="0" marL="0">
               <a:buNone/>
@@ -7571,7 +7571,7 @@
                 <a:latin typeface="Calibri" pitchFamily="34" charset="0"/>
                 <a:cs typeface="Amiri" pitchFamily="2" charset="-78"/>
               </a:rPr>
-              <a:t> or </a:t>
+              <a:t>‏ or ‏</a:t>
             </a:r>
             <a:pPr algn="l" indent="0" marL="0">
               <a:buNone/>
@@ -7598,7 +7598,7 @@
                 <a:latin typeface="Calibri" pitchFamily="34" charset="0"/>
                 <a:cs typeface="Amiri" pitchFamily="2" charset="-78"/>
               </a:rPr>
-              <a:t>. Swap after each question.</a:t>
+              <a:t>‏. Swap after each question.</a:t>
             </a:r>
             <a:endParaRPr lang="en-US" sz="1100" dirty="0"/>
           </a:p>
@@ -8618,7 +8618,7 @@
                 <a:latin typeface="Calibri" pitchFamily="34" charset="0"/>
                 <a:cs typeface="Amiri" pitchFamily="2" charset="-78"/>
               </a:rPr>
-              <a:t>Give a reason with </a:t>
+              <a:t>Give a reason with ‏</a:t>
             </a:r>
             <a:pPr algn="l" indent="0" marL="0">
               <a:buNone/>
@@ -8645,7 +8645,7 @@
                 <a:latin typeface="Calibri" pitchFamily="34" charset="0"/>
                 <a:cs typeface="Amiri" pitchFamily="2" charset="-78"/>
               </a:rPr>
-              <a:t>.</a:t>
+              <a:t>‏.</a:t>
             </a:r>
             <a:endParaRPr lang="en-US" sz="1100" dirty="0"/>
           </a:p>
@@ -9137,7 +9137,7 @@
                 <a:latin typeface="Calibri" pitchFamily="34" charset="0"/>
                 <a:cs typeface="Amiri" pitchFamily="2" charset="-78"/>
               </a:rPr>
-              <a:t>Answer and give a reason with </a:t>
+              <a:t>Answer and give a reason with ‏</a:t>
             </a:r>
             <a:pPr algn="l" indent="0" marL="0">
               <a:buNone/>
@@ -9164,7 +9164,7 @@
                 <a:latin typeface="Calibri" pitchFamily="34" charset="0"/>
                 <a:cs typeface="Amiri" pitchFamily="2" charset="-78"/>
               </a:rPr>
-              <a:t> + noun.</a:t>
+              <a:t>‏ + noun.</a:t>
             </a:r>
             <a:endParaRPr lang="en-US" sz="1100" dirty="0"/>
           </a:p>
@@ -9410,7 +9410,7 @@
                 <a:latin typeface="Calibri" pitchFamily="34" charset="0"/>
                 <a:cs typeface="Amiri" pitchFamily="2" charset="-78"/>
               </a:rPr>
-              <a:t>Give a reason with </a:t>
+              <a:t>Give a reason with ‏</a:t>
             </a:r>
             <a:pPr algn="l" indent="0" marL="0">
               <a:buNone/>
@@ -9437,7 +9437,7 @@
                 <a:latin typeface="Calibri" pitchFamily="34" charset="0"/>
                 <a:cs typeface="Amiri" pitchFamily="2" charset="-78"/>
               </a:rPr>
-              <a:t>.</a:t>
+              <a:t>‏.</a:t>
             </a:r>
             <a:endParaRPr lang="en-US" sz="1100" dirty="0"/>
           </a:p>
@@ -11002,7 +11002,7 @@
                 <a:latin typeface="Calibri" pitchFamily="34" charset="0"/>
                 <a:cs typeface="Amiri" pitchFamily="2" charset="-78"/>
               </a:rPr>
-              <a:t>A reason for each rule: </a:t>
+              <a:t>A reason for each rule: ‏</a:t>
             </a:r>
             <a:pPr algn="l" indent="0" marL="0">
               <a:buNone/>
@@ -11029,7 +11029,7 @@
                 <a:latin typeface="Calibri" pitchFamily="34" charset="0"/>
                 <a:cs typeface="Amiri" pitchFamily="2" charset="-78"/>
               </a:rPr>
-              <a:t> …</a:t>
+              <a:t> …‏</a:t>
             </a:r>
             <a:endParaRPr lang="en-US" sz="1150" dirty="0"/>
           </a:p>
@@ -11166,7 +11166,7 @@
                 <a:latin typeface="Calibri" pitchFamily="34" charset="0"/>
                 <a:cs typeface="Amiri" pitchFamily="2" charset="-78"/>
               </a:rPr>
-              <a:t>Use all three reason forms (</a:t>
+              <a:t>Use all three reason forms (‏</a:t>
             </a:r>
             <a:pPr algn="l" indent="0" marL="0">
               <a:buNone/>
@@ -11247,7 +11247,7 @@
                 <a:latin typeface="Calibri" pitchFamily="34" charset="0"/>
                 <a:cs typeface="Amiri" pitchFamily="2" charset="-78"/>
               </a:rPr>
-              <a:t> + noun) and one imperative: </a:t>
+              <a:t>‏ + noun) and one imperative: ‏</a:t>
             </a:r>
             <a:pPr algn="l" indent="0" marL="0">
               <a:buNone/>
@@ -11274,7 +11274,7 @@
                 <a:latin typeface="Calibri" pitchFamily="34" charset="0"/>
                 <a:cs typeface="Amiri" pitchFamily="2" charset="-78"/>
               </a:rPr>
-              <a:t> …!</a:t>
+              <a:t> …‏!</a:t>
             </a:r>
             <a:endParaRPr lang="en-US" sz="1150" dirty="0"/>
           </a:p>
@@ -17663,7 +17663,7 @@
                 <a:latin typeface="Calibri" pitchFamily="34" charset="0"/>
                 <a:cs typeface="Amiri" pitchFamily="2" charset="-78"/>
               </a:rPr>
-              <a:t>Masculine subject → </a:t>
+              <a:t>Masculine subject → ‏</a:t>
             </a:r>
             <a:pPr algn="l" indent="0" marL="0">
               <a:buNone/>
@@ -17690,7 +17690,7 @@
                 <a:latin typeface="Calibri" pitchFamily="34" charset="0"/>
                 <a:cs typeface="Amiri" pitchFamily="2" charset="-78"/>
               </a:rPr>
-              <a:t>.</a:t>
+              <a:t>‏.</a:t>
             </a:r>
             <a:endParaRPr lang="en-US" sz="1150" dirty="0"/>
           </a:p>
@@ -17894,6 +17894,19 @@
               <a:buNone/>
             </a:pPr>
             <a:r>
+              <a:rPr lang="en-US" sz="1150" b="1" dirty="0">
+                <a:solidFill>
+                  <a:srgbClr val="1B3B6F"/>
+                </a:solidFill>
+                <a:latin typeface="Calibri" pitchFamily="34" charset="0"/>
+                <a:cs typeface="Amiri" pitchFamily="2" charset="-78"/>
+              </a:rPr>
+              <a:t>‏</a:t>
+            </a:r>
+            <a:pPr algn="l" indent="0" marL="0">
+              <a:buNone/>
+            </a:pPr>
+            <a:r>
               <a:rPr lang="ar-SA" altLang="en-US" sz="1500" b="1" dirty="0">
                 <a:solidFill>
                   <a:srgbClr val="1B3B6F"/>
@@ -17915,7 +17928,7 @@
                 <a:latin typeface="Calibri" pitchFamily="34" charset="0"/>
                 <a:cs typeface="Amiri" pitchFamily="2" charset="-78"/>
               </a:rPr>
-              <a:t> + verb ending in -a.</a:t>
+              <a:t>‏ + verb ending in -a.</a:t>
             </a:r>
             <a:endParaRPr lang="en-US" sz="1150" dirty="0"/>
           </a:p>
@@ -18126,7 +18139,7 @@
                 <a:latin typeface="Calibri" pitchFamily="34" charset="0"/>
                 <a:cs typeface="Amiri" pitchFamily="2" charset="-78"/>
               </a:rPr>
-              <a:t>Before a verb: </a:t>
+              <a:t>Before a verb: ‏</a:t>
             </a:r>
             <a:pPr algn="l" indent="0" marL="0">
               <a:buNone/>
@@ -18153,7 +18166,7 @@
                 <a:latin typeface="Calibri" pitchFamily="34" charset="0"/>
                 <a:cs typeface="Amiri" pitchFamily="2" charset="-78"/>
               </a:rPr>
-              <a:t>.</a:t>
+              <a:t>‏.</a:t>
             </a:r>
             <a:endParaRPr lang="en-US" sz="1150" dirty="0"/>
           </a:p>
@@ -20276,7 +20289,7 @@
                 <a:latin typeface="Calibri" pitchFamily="34" charset="0"/>
                 <a:cs typeface="Amiri" pitchFamily="2" charset="-78"/>
               </a:rPr>
-              <a:t>☐  At least one </a:t>
+              <a:t>☐  At least one ‏</a:t>
             </a:r>
             <a:pPr algn="l" indent="0" marL="0">
               <a:buNone/>
@@ -20303,7 +20316,7 @@
                 <a:latin typeface="Calibri" pitchFamily="34" charset="0"/>
                 <a:cs typeface="Amiri" pitchFamily="2" charset="-78"/>
               </a:rPr>
-              <a:t> and one </a:t>
+              <a:t>‏ and one ‏</a:t>
             </a:r>
             <a:pPr algn="l" indent="0" marL="0">
               <a:buNone/>
@@ -20330,7 +20343,7 @@
                 <a:latin typeface="Calibri" pitchFamily="34" charset="0"/>
                 <a:cs typeface="Amiri" pitchFamily="2" charset="-78"/>
               </a:rPr>
-              <a:t> (Develop).</a:t>
+              <a:t>‏ (Develop).</a:t>
             </a:r>
             <a:endParaRPr lang="en-US" sz="1200" dirty="0"/>
           </a:p>
@@ -23654,7 +23667,7 @@
                 <a:latin typeface="Calibri" pitchFamily="34" charset="0"/>
                 <a:cs typeface="Amiri" pitchFamily="2" charset="-78"/>
               </a:rPr>
-              <a:t>answer every “why” with </a:t>
+              <a:t>answer every “why” with ‏</a:t>
             </a:r>
             <a:pPr algn="l" indent="0" marL="0">
               <a:buNone/>
@@ -23681,7 +23694,7 @@
                 <a:latin typeface="Calibri" pitchFamily="34" charset="0"/>
                 <a:cs typeface="Amiri" pitchFamily="2" charset="-78"/>
               </a:rPr>
-              <a:t>?</a:t>
+              <a:t>‏?</a:t>
             </a:r>
             <a:endParaRPr lang="en-US" sz="1100" dirty="0"/>
           </a:p>
@@ -23905,7 +23918,7 @@
                 <a:latin typeface="Calibri" pitchFamily="34" charset="0"/>
                 <a:cs typeface="Amiri" pitchFamily="2" charset="-78"/>
               </a:rPr>
-              <a:t>end every verb after </a:t>
+              <a:t>end every verb after ‏</a:t>
             </a:r>
             <a:pPr algn="l" indent="0" marL="0">
               <a:buNone/>
@@ -23932,7 +23945,7 @@
                 <a:latin typeface="Calibri" pitchFamily="34" charset="0"/>
                 <a:cs typeface="Amiri" pitchFamily="2" charset="-78"/>
               </a:rPr>
-              <a:t> in -a?</a:t>
+              <a:t>‏ in -a?</a:t>
             </a:r>
             <a:endParaRPr lang="en-US" sz="1100" dirty="0"/>
           </a:p>
@@ -24091,7 +24104,7 @@
                 <a:latin typeface="Calibri" pitchFamily="34" charset="0"/>
                 <a:cs typeface="Amiri" pitchFamily="2" charset="-78"/>
               </a:rPr>
-              <a:t>use linking words (</a:t>
+              <a:t>use linking words (‏</a:t>
             </a:r>
             <a:pPr algn="l" indent="0" marL="0">
               <a:buNone/>
@@ -24199,7 +24212,7 @@
                 <a:latin typeface="Calibri" pitchFamily="34" charset="0"/>
                 <a:cs typeface="Amiri" pitchFamily="2" charset="-78"/>
               </a:rPr>
-              <a:t>)?</a:t>
+              <a:t>‏)?</a:t>
             </a:r>
             <a:endParaRPr lang="en-US" sz="1100" dirty="0"/>
           </a:p>
@@ -28145,7 +28158,7 @@
                 <a:latin typeface="Calibri" pitchFamily="34" charset="0"/>
                 <a:cs typeface="Amiri" pitchFamily="2" charset="-78"/>
               </a:rPr>
-              <a:t>I added reasons (</a:t>
+              <a:t>I added reasons (‏</a:t>
             </a:r>
             <a:pPr algn="l" indent="0" marL="0">
               <a:buNone/>
@@ -28172,7 +28185,7 @@
                 <a:latin typeface="Calibri" pitchFamily="34" charset="0"/>
                 <a:cs typeface="Amiri" pitchFamily="2" charset="-78"/>
               </a:rPr>
-              <a:t>) and extra details without frames.</a:t>
+              <a:t>‏) and extra details without frames.</a:t>
             </a:r>
             <a:endParaRPr lang="en-US" sz="1300" dirty="0"/>
           </a:p>
@@ -32300,7 +32313,7 @@
                 <a:latin typeface="Calibri" pitchFamily="34" charset="0"/>
                 <a:cs typeface="Amiri" pitchFamily="2" charset="-78"/>
               </a:rPr>
-              <a:t>☐  Add a reason (</a:t>
+              <a:t>☐  Add a reason (‏</a:t>
             </a:r>
             <a:pPr algn="l" indent="0" marL="0">
               <a:buNone/>
@@ -32327,7 +32340,7 @@
                 <a:latin typeface="Calibri" pitchFamily="34" charset="0"/>
                 <a:cs typeface="Amiri" pitchFamily="2" charset="-78"/>
               </a:rPr>
-              <a:t>) and an extra detail to every point.</a:t>
+              <a:t>‏) and an extra detail to every point.</a:t>
             </a:r>
             <a:endParaRPr lang="en-US" sz="1300" dirty="0"/>
           </a:p>
@@ -33848,7 +33861,7 @@
                 <a:latin typeface="Calibri" pitchFamily="34" charset="0"/>
                 <a:cs typeface="Amiri" pitchFamily="2" charset="-78"/>
               </a:rPr>
-              <a:t>Join a word from each lesson in one sentence with </a:t>
+              <a:t>Join a word from each lesson in one sentence with ‏</a:t>
             </a:r>
             <a:pPr algn="l" indent="0" marL="0">
               <a:buNone/>
@@ -33875,7 +33888,7 @@
                 <a:latin typeface="Calibri" pitchFamily="34" charset="0"/>
                 <a:cs typeface="Amiri" pitchFamily="2" charset="-78"/>
               </a:rPr>
-              <a:t> or </a:t>
+              <a:t>‏ or ‏</a:t>
             </a:r>
             <a:pPr algn="l" indent="0" marL="0">
               <a:buNone/>
@@ -33902,7 +33915,7 @@
                 <a:latin typeface="Calibri" pitchFamily="34" charset="0"/>
                 <a:cs typeface="Amiri" pitchFamily="2" charset="-78"/>
               </a:rPr>
-              <a:t>.</a:t>
+              <a:t>‏.</a:t>
             </a:r>
             <a:endParaRPr lang="en-US" sz="1150" dirty="0"/>
           </a:p>
